--- a/examples/playground/_out/05_from_spec_declarative.pptx
+++ b/examples/playground/_out/05_from_spec_declarative.pptx
@@ -11,7 +11,7 @@
     <p:sldId id="259" r:id="rId10"/>
     <p:sldId id="260" r:id="rId11"/>
   </p:sldIdLst>
-  <p:sldSz cx="9144000" cy="6858000" type="screen4x3"/>
+  <p:sldSz cx="12191695" cy="6858000" type="screen4x3"/>
   <p:notesSz cx="6858000" cy="9144000"/>
   <p:defaultTextStyle>
     <a:defPPr>
@@ -3101,7 +3101,7 @@
         <p:spPr>
           <a:xfrm>
             <a:off x="914400" y="2606040"/>
-            <a:ext cx="7315200" cy="1463040"/>
+            <a:ext cx="10362895" cy="1463040"/>
           </a:xfrm>
           <a:prstGeom prst="rect">
             <a:avLst/>
@@ -3110,7 +3110,7 @@
         </p:spPr>
         <p:txBody>
           <a:bodyPr wrap="square" anchor="ctr">
-            <a:spAutoFit/>
+            <a:normAutofit/>
           </a:bodyPr>
           <a:lstStyle/>
           <a:p>
@@ -3136,7 +3136,7 @@
         <p:spPr>
           <a:xfrm>
             <a:off x="914400" y="4160520"/>
-            <a:ext cx="7315200" cy="731520"/>
+            <a:ext cx="10362895" cy="731520"/>
           </a:xfrm>
           <a:prstGeom prst="rect">
             <a:avLst/>
@@ -3192,7 +3192,7 @@
         <p:spPr>
           <a:xfrm>
             <a:off x="548640" y="457200"/>
-            <a:ext cx="8046720" cy="822960"/>
+            <a:ext cx="11094415" cy="822960"/>
           </a:xfrm>
           <a:prstGeom prst="rect">
             <a:avLst/>
@@ -3201,7 +3201,7 @@
         </p:spPr>
         <p:txBody>
           <a:bodyPr wrap="square" anchor="t">
-            <a:spAutoFit/>
+            <a:normAutofit/>
           </a:bodyPr>
           <a:lstStyle/>
           <a:p>
@@ -3227,7 +3227,7 @@
         <p:spPr>
           <a:xfrm>
             <a:off x="548640" y="1645920"/>
-            <a:ext cx="2529840" cy="1737360"/>
+            <a:ext cx="3545738" cy="1737360"/>
           </a:xfrm>
           <a:prstGeom prst="roundRect">
             <a:avLst/>
@@ -3273,7 +3273,7 @@
         <p:spPr>
           <a:xfrm>
             <a:off x="548640" y="1874520"/>
-            <a:ext cx="2529840" cy="777240"/>
+            <a:ext cx="3545738" cy="777240"/>
           </a:xfrm>
           <a:prstGeom prst="rect">
             <a:avLst/>
@@ -3282,7 +3282,7 @@
         </p:spPr>
         <p:txBody>
           <a:bodyPr wrap="square" anchor="ctr">
-            <a:spAutoFit/>
+            <a:normAutofit/>
           </a:bodyPr>
           <a:lstStyle/>
           <a:p>
@@ -3308,7 +3308,7 @@
         <p:spPr>
           <a:xfrm>
             <a:off x="548640" y="2651760"/>
-            <a:ext cx="2529840" cy="365760"/>
+            <a:ext cx="3545738" cy="365760"/>
           </a:xfrm>
           <a:prstGeom prst="rect">
             <a:avLst/>
@@ -3317,7 +3317,7 @@
         </p:spPr>
         <p:txBody>
           <a:bodyPr wrap="square" anchor="t">
-            <a:spAutoFit/>
+            <a:normAutofit/>
           </a:bodyPr>
           <a:lstStyle/>
           <a:p>
@@ -3343,7 +3343,7 @@
         <p:spPr>
           <a:xfrm>
             <a:off x="548640" y="3017520"/>
-            <a:ext cx="2529840" cy="320040"/>
+            <a:ext cx="3545738" cy="320040"/>
           </a:xfrm>
           <a:prstGeom prst="rect">
             <a:avLst/>
@@ -3352,7 +3352,7 @@
         </p:spPr>
         <p:txBody>
           <a:bodyPr wrap="square" anchor="t">
-            <a:spAutoFit/>
+            <a:normAutofit/>
           </a:bodyPr>
           <a:lstStyle/>
           <a:p>
@@ -3377,8 +3377,8 @@
         </p:nvSpPr>
         <p:spPr>
           <a:xfrm>
-            <a:off x="3307080" y="1645920"/>
-            <a:ext cx="2529840" cy="1737360"/>
+            <a:off x="4322978" y="1645920"/>
+            <a:ext cx="3545738" cy="1737360"/>
           </a:xfrm>
           <a:prstGeom prst="roundRect">
             <a:avLst/>
@@ -3423,8 +3423,8 @@
         </p:nvSpPr>
         <p:spPr>
           <a:xfrm>
-            <a:off x="3307080" y="1874520"/>
-            <a:ext cx="2529840" cy="777240"/>
+            <a:off x="4322978" y="1874520"/>
+            <a:ext cx="3545738" cy="777240"/>
           </a:xfrm>
           <a:prstGeom prst="rect">
             <a:avLst/>
@@ -3433,7 +3433,7 @@
         </p:spPr>
         <p:txBody>
           <a:bodyPr wrap="square" anchor="ctr">
-            <a:spAutoFit/>
+            <a:normAutofit/>
           </a:bodyPr>
           <a:lstStyle/>
           <a:p>
@@ -3458,8 +3458,8 @@
         </p:nvSpPr>
         <p:spPr>
           <a:xfrm>
-            <a:off x="3307080" y="2651760"/>
-            <a:ext cx="2529840" cy="365760"/>
+            <a:off x="4322978" y="2651760"/>
+            <a:ext cx="3545738" cy="365760"/>
           </a:xfrm>
           <a:prstGeom prst="rect">
             <a:avLst/>
@@ -3468,7 +3468,7 @@
         </p:spPr>
         <p:txBody>
           <a:bodyPr wrap="square" anchor="t">
-            <a:spAutoFit/>
+            <a:normAutofit/>
           </a:bodyPr>
           <a:lstStyle/>
           <a:p>
@@ -3493,8 +3493,8 @@
         </p:nvSpPr>
         <p:spPr>
           <a:xfrm>
-            <a:off x="3307080" y="3017520"/>
-            <a:ext cx="2529840" cy="320040"/>
+            <a:off x="4322978" y="3017520"/>
+            <a:ext cx="3545738" cy="320040"/>
           </a:xfrm>
           <a:prstGeom prst="rect">
             <a:avLst/>
@@ -3503,7 +3503,7 @@
         </p:spPr>
         <p:txBody>
           <a:bodyPr wrap="square" anchor="t">
-            <a:spAutoFit/>
+            <a:normAutofit/>
           </a:bodyPr>
           <a:lstStyle/>
           <a:p>
@@ -3528,8 +3528,8 @@
         </p:nvSpPr>
         <p:spPr>
           <a:xfrm>
-            <a:off x="6065520" y="1645920"/>
-            <a:ext cx="2529840" cy="1737360"/>
+            <a:off x="8097316" y="1645920"/>
+            <a:ext cx="3545738" cy="1737360"/>
           </a:xfrm>
           <a:prstGeom prst="roundRect">
             <a:avLst/>
@@ -3574,8 +3574,8 @@
         </p:nvSpPr>
         <p:spPr>
           <a:xfrm>
-            <a:off x="6065520" y="1874520"/>
-            <a:ext cx="2529840" cy="777240"/>
+            <a:off x="8097316" y="1874520"/>
+            <a:ext cx="3545738" cy="777240"/>
           </a:xfrm>
           <a:prstGeom prst="rect">
             <a:avLst/>
@@ -3584,7 +3584,7 @@
         </p:spPr>
         <p:txBody>
           <a:bodyPr wrap="square" anchor="ctr">
-            <a:spAutoFit/>
+            <a:normAutofit/>
           </a:bodyPr>
           <a:lstStyle/>
           <a:p>
@@ -3609,8 +3609,8 @@
         </p:nvSpPr>
         <p:spPr>
           <a:xfrm>
-            <a:off x="6065520" y="2651760"/>
-            <a:ext cx="2529840" cy="365760"/>
+            <a:off x="8097316" y="2651760"/>
+            <a:ext cx="3545738" cy="365760"/>
           </a:xfrm>
           <a:prstGeom prst="rect">
             <a:avLst/>
@@ -3619,7 +3619,7 @@
         </p:spPr>
         <p:txBody>
           <a:bodyPr wrap="square" anchor="t">
-            <a:spAutoFit/>
+            <a:normAutofit/>
           </a:bodyPr>
           <a:lstStyle/>
           <a:p>
@@ -3644,8 +3644,8 @@
         </p:nvSpPr>
         <p:spPr>
           <a:xfrm>
-            <a:off x="6065520" y="3017520"/>
-            <a:ext cx="2529840" cy="320040"/>
+            <a:off x="8097316" y="3017520"/>
+            <a:ext cx="3545738" cy="320040"/>
           </a:xfrm>
           <a:prstGeom prst="rect">
             <a:avLst/>
@@ -3654,7 +3654,7 @@
         </p:spPr>
         <p:txBody>
           <a:bodyPr wrap="square" anchor="t">
-            <a:spAutoFit/>
+            <a:normAutofit/>
           </a:bodyPr>
           <a:lstStyle/>
           <a:p>
@@ -3698,7 +3698,7 @@
         <p:spPr>
           <a:xfrm>
             <a:off x="548640" y="457200"/>
-            <a:ext cx="8046720" cy="914400"/>
+            <a:ext cx="11094415" cy="914400"/>
           </a:xfrm>
           <a:prstGeom prst="rect">
             <a:avLst/>
@@ -3707,7 +3707,7 @@
         </p:spPr>
         <p:txBody>
           <a:bodyPr wrap="square" anchor="t">
-            <a:spAutoFit/>
+            <a:normAutofit/>
           </a:bodyPr>
           <a:lstStyle/>
           <a:p>
@@ -3733,7 +3733,7 @@
         <p:spPr>
           <a:xfrm>
             <a:off x="548640" y="1554480"/>
-            <a:ext cx="8046720" cy="4846320"/>
+            <a:ext cx="11094415" cy="4846320"/>
           </a:xfrm>
           <a:prstGeom prst="rect">
             <a:avLst/>
@@ -3854,7 +3854,7 @@
         <p:spPr>
           <a:xfrm>
             <a:off x="1097280" y="1828800"/>
-            <a:ext cx="6949440" cy="3200400"/>
+            <a:ext cx="9997135" cy="3200400"/>
           </a:xfrm>
           <a:prstGeom prst="rect">
             <a:avLst/>
@@ -3863,7 +3863,7 @@
         </p:spPr>
         <p:txBody>
           <a:bodyPr wrap="square" anchor="ctr">
-            <a:spAutoFit/>
+            <a:normAutofit/>
           </a:bodyPr>
           <a:lstStyle/>
           <a:p>
@@ -3889,7 +3889,7 @@
         <p:spPr>
           <a:xfrm>
             <a:off x="1097280" y="5120640"/>
-            <a:ext cx="6949440" cy="548640"/>
+            <a:ext cx="9997135" cy="548640"/>
           </a:xfrm>
           <a:prstGeom prst="rect">
             <a:avLst/>
@@ -3942,7 +3942,7 @@
         <p:spPr>
           <a:xfrm>
             <a:off x="914400" y="2606040"/>
-            <a:ext cx="7315200" cy="1463040"/>
+            <a:ext cx="10362895" cy="1463040"/>
           </a:xfrm>
           <a:prstGeom prst="rect">
             <a:avLst/>
@@ -3951,7 +3951,7 @@
         </p:spPr>
         <p:txBody>
           <a:bodyPr wrap="square" anchor="ctr">
-            <a:spAutoFit/>
+            <a:normAutofit/>
           </a:bodyPr>
           <a:lstStyle/>
           <a:p>
@@ -3977,7 +3977,7 @@
         <p:spPr>
           <a:xfrm>
             <a:off x="914400" y="4160520"/>
-            <a:ext cx="7315200" cy="731520"/>
+            <a:ext cx="10362895" cy="731520"/>
           </a:xfrm>
           <a:prstGeom prst="rect">
             <a:avLst/>
